--- a/classes/parte-4-seguridad-de-aplicaciones-web/092-inyeccion-sql-avanzada-y-ciega-blind/clase-092-presentacion.pptx
+++ b/classes/parte-4-seguridad-de-aplicaciones-web/092-inyeccion-sql-avanzada-y-ciega-blind/clase-092-presentacion.pptx
@@ -17,6 +17,9 @@
     <p:sldId id="265" r:id="rId16"/>
     <p:sldId id="266" r:id="rId17"/>
     <p:sldId id="267" r:id="rId18"/>
+    <p:sldId id="268" r:id="rId19"/>
+    <p:sldId id="269" r:id="rId20"/>
+    <p:sldId id="270" r:id="rId21"/>
   </p:sldIdLst>
   <p:sldSz cx="9144000" cy="6858000" type="screen4x3"/>
   <p:notesSz cx="6858000" cy="9144000"/>
@@ -3198,7 +3201,7 @@
                   <a:srgbClr val="0B3D2E"/>
                 </a:solidFill>
               </a:rPr>
-              <a:t>⚠️ Errores comunes</a:t>
+              <a:t>✍️ Ejercicios</a:t>
             </a:r>
           </a:p>
         </p:txBody>
@@ -3236,67 +3239,82 @@
                   <a:srgbClr val="22282E"/>
                 </a:solidFill>
               </a:rPr>
-              <a:t>•  El oráculo no es fiable — Elige una señal más estable (código o longitud)</a:t>
-            </a:r>
-          </a:p>
-          <a:p>
-            <a:pPr>
-              <a:spcAft>
-                <a:spcPts val="600"/>
-              </a:spcAft>
-            </a:pPr>
-            <a:r>
-              <a:rPr sz="1500">
-                <a:solidFill>
-                  <a:srgbClr val="22282E"/>
-                </a:solidFill>
-              </a:rPr>
-              <a:t>•  Extracción lentísima — Usa búsqueda binaria y concurrencia</a:t>
-            </a:r>
-          </a:p>
-          <a:p>
-            <a:pPr>
-              <a:spcAft>
-                <a:spcPts val="600"/>
-              </a:spcAft>
-            </a:pPr>
-            <a:r>
-              <a:rPr sz="1500">
-                <a:solidFill>
-                  <a:srgbClr val="22282E"/>
-                </a:solidFill>
-              </a:rPr>
-              <a:t>•  SLEEP no funciona — Motor distinto; usa la función correcta</a:t>
-            </a:r>
-          </a:p>
-          <a:p>
-            <a:pPr>
-              <a:spcAft>
-                <a:spcPts val="600"/>
-              </a:spcAft>
-            </a:pPr>
-            <a:r>
-              <a:rPr sz="1500">
-                <a:solidFill>
-                  <a:srgbClr val="22282E"/>
-                </a:solidFill>
-              </a:rPr>
-              <a:t>•  OOB sin interacciones — El motor no permite conexiones salientes</a:t>
-            </a:r>
-          </a:p>
-          <a:p>
-            <a:pPr>
-              <a:spcAft>
-                <a:spcPts val="600"/>
-              </a:spcAft>
-            </a:pPr>
-            <a:r>
-              <a:rPr sz="1500">
-                <a:solidFill>
-                  <a:srgbClr val="22282E"/>
-                </a:solidFill>
-              </a:rPr>
-              <a:t>•  Resultados intermitentes — Rate limiting; añade delays y reintentos</a:t>
+              <a:t>•  Reconstruye una contraseña de 20 caracteres con blind booleana y mide cuántas peticiones costó.</a:t>
+            </a:r>
+          </a:p>
+          <a:p>
+            <a:pPr>
+              <a:spcAft>
+                <a:spcPts val="600"/>
+              </a:spcAft>
+            </a:pPr>
+            <a:r>
+              <a:rPr sz="1500">
+                <a:solidFill>
+                  <a:srgbClr val="22282E"/>
+                </a:solidFill>
+              </a:rPr>
+              <a:t>•  Optimiza la extracción usando búsqueda binaria (&gt; en vez de =).</a:t>
+            </a:r>
+          </a:p>
+          <a:p>
+            <a:pPr>
+              <a:spcAft>
+                <a:spcPts val="600"/>
+              </a:spcAft>
+            </a:pPr>
+            <a:r>
+              <a:rPr sz="1500">
+                <a:solidFill>
+                  <a:srgbClr val="22282E"/>
+                </a:solidFill>
+              </a:rPr>
+              <a:t>•  Escribe el payload temporal equivalente para MySQL, MSSQL y PostgreSQL.</a:t>
+            </a:r>
+          </a:p>
+          <a:p>
+            <a:pPr>
+              <a:spcAft>
+                <a:spcPts val="600"/>
+              </a:spcAft>
+            </a:pPr>
+            <a:r>
+              <a:rPr sz="1500">
+                <a:solidFill>
+                  <a:srgbClr val="22282E"/>
+                </a:solidFill>
+              </a:rPr>
+              <a:t>•  Explica por qué la blind temporal es la más ruidosa y lenta.</a:t>
+            </a:r>
+          </a:p>
+          <a:p>
+            <a:pPr>
+              <a:spcAft>
+                <a:spcPts val="600"/>
+              </a:spcAft>
+            </a:pPr>
+            <a:r>
+              <a:rPr sz="1500">
+                <a:solidFill>
+                  <a:srgbClr val="22282E"/>
+                </a:solidFill>
+              </a:rPr>
+              <a:t>•  Diseña un oráculo booleano a partir del tamaño de la respuesta.</a:t>
+            </a:r>
+          </a:p>
+          <a:p>
+            <a:pPr>
+              <a:spcAft>
+                <a:spcPts val="600"/>
+              </a:spcAft>
+            </a:pPr>
+            <a:r>
+              <a:rPr sz="1500">
+                <a:solidFill>
+                  <a:srgbClr val="22282E"/>
+                </a:solidFill>
+              </a:rPr>
+              <a:t>•  Describe un escenario de second-order SQLi con un caso de registro de usuario.</a:t>
             </a:r>
           </a:p>
         </p:txBody>
@@ -3347,7 +3365,7 @@
                   <a:srgbClr val="0B3D2E"/>
                 </a:solidFill>
               </a:rPr>
-              <a:t>❓ Preguntas frecuentes</a:t>
+              <a:t>📝 Reto verificable</a:t>
             </a:r>
           </a:p>
         </p:txBody>
@@ -3385,82 +3403,22 @@
                   <a:srgbClr val="22282E"/>
                 </a:solidFill>
               </a:rPr>
-              <a:t>•  ❓ ¿Cuándo uso temporal en vez de booleana?</a:t>
-            </a:r>
-          </a:p>
-          <a:p>
-            <a:pPr>
-              <a:spcAft>
-                <a:spcPts val="600"/>
-              </a:spcAft>
-            </a:pPr>
-            <a:r>
-              <a:rPr sz="1500">
-                <a:solidFill>
-                  <a:srgbClr val="22282E"/>
-                </a:solidFill>
-              </a:rPr>
-              <a:t>•  Cuando no hay ninguna diferencia observable en la respuesta salvo el tiempo. Es más lenta, úsala como último recurso.</a:t>
-            </a:r>
-          </a:p>
-          <a:p>
-            <a:pPr>
-              <a:spcAft>
-                <a:spcPts val="600"/>
-              </a:spcAft>
-            </a:pPr>
-            <a:r>
-              <a:rPr sz="1500">
-                <a:solidFill>
-                  <a:srgbClr val="22282E"/>
-                </a:solidFill>
-              </a:rPr>
-              <a:t>•  ❓ ¿Qué es exactamente second-order?</a:t>
-            </a:r>
-          </a:p>
-          <a:p>
-            <a:pPr>
-              <a:spcAft>
-                <a:spcPts val="600"/>
-              </a:spcAft>
-            </a:pPr>
-            <a:r>
-              <a:rPr sz="1500">
-                <a:solidFill>
-                  <a:srgbClr val="22282E"/>
-                </a:solidFill>
-              </a:rPr>
-              <a:t>•  El input malicioso se guarda sin ejecutarse y detona en otra consulta posterior (por ejemplo, al mostrar el perfil).</a:t>
-            </a:r>
-          </a:p>
-          <a:p>
-            <a:pPr>
-              <a:spcAft>
-                <a:spcPts val="600"/>
-              </a:spcAft>
-            </a:pPr>
-            <a:r>
-              <a:rPr sz="1500">
-                <a:solidFill>
-                  <a:srgbClr val="22282E"/>
-                </a:solidFill>
-              </a:rPr>
-              <a:t>•  ❓ ¿Por qué la búsqueda binaria acelera tanto?</a:t>
-            </a:r>
-          </a:p>
-          <a:p>
-            <a:pPr>
-              <a:spcAft>
-                <a:spcPts val="600"/>
-              </a:spcAft>
-            </a:pPr>
-            <a:r>
-              <a:rPr sz="1500">
-                <a:solidFill>
-                  <a:srgbClr val="22282E"/>
-                </a:solidFill>
-              </a:rPr>
-              <a:t>•  Reduce las pruebas por carácter de ~128 a ~7 comparaciones (log2), un ahorro enorme.</a:t>
+              <a:t>•  Extrae la contraseña completa del usuario administrator en un lab de blind SQLi de PortSwigger usando solo condiciones booleanas automatizadas.</a:t>
+            </a:r>
+          </a:p>
+          <a:p>
+            <a:pPr>
+              <a:spcAft>
+                <a:spcPts val="600"/>
+              </a:spcAft>
+            </a:pPr>
+            <a:r>
+              <a:rPr sz="1500">
+                <a:solidFill>
+                  <a:srgbClr val="22282E"/>
+                </a:solidFill>
+              </a:rPr>
+              <a:t>•  Criterio de aceptación: entregas la contraseña recuperada, la configuración de Intruder (posiciones y payload set) y el número de peticiones necesarias, resolviendo el lab.</a:t>
             </a:r>
           </a:p>
         </p:txBody>
@@ -3511,7 +3469,7 @@
                   <a:srgbClr val="0B3D2E"/>
                 </a:solidFill>
               </a:rPr>
-              <a:t>🔗 Referencias</a:t>
+              <a:t>⚠️ Errores comunes</a:t>
             </a:r>
           </a:p>
         </p:txBody>
@@ -3549,6 +3507,319 @@
                   <a:srgbClr val="22282E"/>
                 </a:solidFill>
               </a:rPr>
+              <a:t>•  El oráculo no es fiable — Elige una señal más estable (código o longitud)</a:t>
+            </a:r>
+          </a:p>
+          <a:p>
+            <a:pPr>
+              <a:spcAft>
+                <a:spcPts val="600"/>
+              </a:spcAft>
+            </a:pPr>
+            <a:r>
+              <a:rPr sz="1500">
+                <a:solidFill>
+                  <a:srgbClr val="22282E"/>
+                </a:solidFill>
+              </a:rPr>
+              <a:t>•  Extracción lentísima — Usa búsqueda binaria y concurrencia</a:t>
+            </a:r>
+          </a:p>
+          <a:p>
+            <a:pPr>
+              <a:spcAft>
+                <a:spcPts val="600"/>
+              </a:spcAft>
+            </a:pPr>
+            <a:r>
+              <a:rPr sz="1500">
+                <a:solidFill>
+                  <a:srgbClr val="22282E"/>
+                </a:solidFill>
+              </a:rPr>
+              <a:t>•  SLEEP no funciona — Motor distinto; usa la función correcta</a:t>
+            </a:r>
+          </a:p>
+          <a:p>
+            <a:pPr>
+              <a:spcAft>
+                <a:spcPts val="600"/>
+              </a:spcAft>
+            </a:pPr>
+            <a:r>
+              <a:rPr sz="1500">
+                <a:solidFill>
+                  <a:srgbClr val="22282E"/>
+                </a:solidFill>
+              </a:rPr>
+              <a:t>•  OOB sin interacciones — El motor no permite conexiones salientes</a:t>
+            </a:r>
+          </a:p>
+          <a:p>
+            <a:pPr>
+              <a:spcAft>
+                <a:spcPts val="600"/>
+              </a:spcAft>
+            </a:pPr>
+            <a:r>
+              <a:rPr sz="1500">
+                <a:solidFill>
+                  <a:srgbClr val="22282E"/>
+                </a:solidFill>
+              </a:rPr>
+              <a:t>•  Resultados intermitentes — Rate limiting; añade delays y reintentos</a:t>
+            </a:r>
+          </a:p>
+        </p:txBody>
+      </p:sp>
+    </p:spTree>
+  </p:cSld>
+  <p:clrMapOvr>
+    <a:masterClrMapping/>
+  </p:clrMapOvr>
+</p:sld>
+</file>
+
+<file path=ppt/slides/slide13.xml><?xml version="1.0" encoding="utf-8"?>
+<p:sld xmlns:a="http://schemas.openxmlformats.org/drawingml/2006/main" xmlns:p="http://schemas.openxmlformats.org/presentationml/2006/main" xmlns:r="http://schemas.openxmlformats.org/officeDocument/2006/relationships">
+  <p:cSld>
+    <p:spTree>
+      <p:nvGrpSpPr>
+        <p:cNvPr id="1" name=""/>
+        <p:cNvGrpSpPr/>
+        <p:nvPr/>
+      </p:nvGrpSpPr>
+      <p:grpSpPr/>
+      <p:sp>
+        <p:nvSpPr>
+          <p:cNvPr id="2" name="TextBox 1"/>
+          <p:cNvSpPr txBox="1"/>
+          <p:nvPr/>
+        </p:nvSpPr>
+        <p:spPr>
+          <a:xfrm>
+            <a:off x="457200" y="320040"/>
+            <a:ext cx="8229600" cy="822960"/>
+          </a:xfrm>
+          <a:prstGeom prst="rect">
+            <a:avLst/>
+          </a:prstGeom>
+          <a:noFill/>
+        </p:spPr>
+        <p:txBody>
+          <a:bodyPr wrap="square">
+            <a:spAutoFit/>
+          </a:bodyPr>
+          <a:lstStyle/>
+          <a:p>
+            <a:r>
+              <a:rPr sz="2600" b="1">
+                <a:solidFill>
+                  <a:srgbClr val="0B3D2E"/>
+                </a:solidFill>
+              </a:rPr>
+              <a:t>❓ Preguntas frecuentes</a:t>
+            </a:r>
+          </a:p>
+        </p:txBody>
+      </p:sp>
+      <p:sp>
+        <p:nvSpPr>
+          <p:cNvPr id="3" name="TextBox 2"/>
+          <p:cNvSpPr txBox="1"/>
+          <p:nvPr/>
+        </p:nvSpPr>
+        <p:spPr>
+          <a:xfrm>
+            <a:off x="457200" y="1280160"/>
+            <a:ext cx="8229600" cy="4937760"/>
+          </a:xfrm>
+          <a:prstGeom prst="rect">
+            <a:avLst/>
+          </a:prstGeom>
+          <a:noFill/>
+        </p:spPr>
+        <p:txBody>
+          <a:bodyPr wrap="square">
+            <a:spAutoFit/>
+          </a:bodyPr>
+          <a:lstStyle/>
+          <a:p>
+            <a:pPr>
+              <a:spcAft>
+                <a:spcPts val="600"/>
+              </a:spcAft>
+            </a:pPr>
+            <a:r>
+              <a:rPr sz="1500">
+                <a:solidFill>
+                  <a:srgbClr val="22282E"/>
+                </a:solidFill>
+              </a:rPr>
+              <a:t>•  ❓ ¿Cuándo uso temporal en vez de booleana?</a:t>
+            </a:r>
+          </a:p>
+          <a:p>
+            <a:pPr>
+              <a:spcAft>
+                <a:spcPts val="600"/>
+              </a:spcAft>
+            </a:pPr>
+            <a:r>
+              <a:rPr sz="1500">
+                <a:solidFill>
+                  <a:srgbClr val="22282E"/>
+                </a:solidFill>
+              </a:rPr>
+              <a:t>•  Cuando no hay ninguna diferencia observable en la respuesta salvo el tiempo. Es más lenta, úsala como último recurso.</a:t>
+            </a:r>
+          </a:p>
+          <a:p>
+            <a:pPr>
+              <a:spcAft>
+                <a:spcPts val="600"/>
+              </a:spcAft>
+            </a:pPr>
+            <a:r>
+              <a:rPr sz="1500">
+                <a:solidFill>
+                  <a:srgbClr val="22282E"/>
+                </a:solidFill>
+              </a:rPr>
+              <a:t>•  ❓ ¿Qué es exactamente second-order?</a:t>
+            </a:r>
+          </a:p>
+          <a:p>
+            <a:pPr>
+              <a:spcAft>
+                <a:spcPts val="600"/>
+              </a:spcAft>
+            </a:pPr>
+            <a:r>
+              <a:rPr sz="1500">
+                <a:solidFill>
+                  <a:srgbClr val="22282E"/>
+                </a:solidFill>
+              </a:rPr>
+              <a:t>•  El input malicioso se guarda sin ejecutarse y detona en otra consulta posterior (por ejemplo, al mostrar el perfil).</a:t>
+            </a:r>
+          </a:p>
+          <a:p>
+            <a:pPr>
+              <a:spcAft>
+                <a:spcPts val="600"/>
+              </a:spcAft>
+            </a:pPr>
+            <a:r>
+              <a:rPr sz="1500">
+                <a:solidFill>
+                  <a:srgbClr val="22282E"/>
+                </a:solidFill>
+              </a:rPr>
+              <a:t>•  ❓ ¿Por qué la búsqueda binaria acelera tanto?</a:t>
+            </a:r>
+          </a:p>
+          <a:p>
+            <a:pPr>
+              <a:spcAft>
+                <a:spcPts val="600"/>
+              </a:spcAft>
+            </a:pPr>
+            <a:r>
+              <a:rPr sz="1500">
+                <a:solidFill>
+                  <a:srgbClr val="22282E"/>
+                </a:solidFill>
+              </a:rPr>
+              <a:t>•  Reduce las pruebas por carácter de ~128 a ~7 comparaciones (log2), un ahorro enorme.</a:t>
+            </a:r>
+          </a:p>
+        </p:txBody>
+      </p:sp>
+    </p:spTree>
+  </p:cSld>
+  <p:clrMapOvr>
+    <a:masterClrMapping/>
+  </p:clrMapOvr>
+</p:sld>
+</file>
+
+<file path=ppt/slides/slide14.xml><?xml version="1.0" encoding="utf-8"?>
+<p:sld xmlns:a="http://schemas.openxmlformats.org/drawingml/2006/main" xmlns:p="http://schemas.openxmlformats.org/presentationml/2006/main" xmlns:r="http://schemas.openxmlformats.org/officeDocument/2006/relationships">
+  <p:cSld>
+    <p:spTree>
+      <p:nvGrpSpPr>
+        <p:cNvPr id="1" name=""/>
+        <p:cNvGrpSpPr/>
+        <p:nvPr/>
+      </p:nvGrpSpPr>
+      <p:grpSpPr/>
+      <p:sp>
+        <p:nvSpPr>
+          <p:cNvPr id="2" name="TextBox 1"/>
+          <p:cNvSpPr txBox="1"/>
+          <p:nvPr/>
+        </p:nvSpPr>
+        <p:spPr>
+          <a:xfrm>
+            <a:off x="457200" y="320040"/>
+            <a:ext cx="8229600" cy="822960"/>
+          </a:xfrm>
+          <a:prstGeom prst="rect">
+            <a:avLst/>
+          </a:prstGeom>
+          <a:noFill/>
+        </p:spPr>
+        <p:txBody>
+          <a:bodyPr wrap="square">
+            <a:spAutoFit/>
+          </a:bodyPr>
+          <a:lstStyle/>
+          <a:p>
+            <a:r>
+              <a:rPr sz="2600" b="1">
+                <a:solidFill>
+                  <a:srgbClr val="0B3D2E"/>
+                </a:solidFill>
+              </a:rPr>
+              <a:t>🔗 Referencias</a:t>
+            </a:r>
+          </a:p>
+        </p:txBody>
+      </p:sp>
+      <p:sp>
+        <p:nvSpPr>
+          <p:cNvPr id="3" name="TextBox 2"/>
+          <p:cNvSpPr txBox="1"/>
+          <p:nvPr/>
+        </p:nvSpPr>
+        <p:spPr>
+          <a:xfrm>
+            <a:off x="457200" y="1280160"/>
+            <a:ext cx="8229600" cy="4937760"/>
+          </a:xfrm>
+          <a:prstGeom prst="rect">
+            <a:avLst/>
+          </a:prstGeom>
+          <a:noFill/>
+        </p:spPr>
+        <p:txBody>
+          <a:bodyPr wrap="square">
+            <a:spAutoFit/>
+          </a:bodyPr>
+          <a:lstStyle/>
+          <a:p>
+            <a:pPr>
+              <a:spcAft>
+                <a:spcPts val="600"/>
+              </a:spcAft>
+            </a:pPr>
+            <a:r>
+              <a:rPr sz="1500">
+                <a:solidFill>
+                  <a:srgbClr val="22282E"/>
+                </a:solidFill>
+              </a:rPr>
               <a:t>•  Stuttard &amp; Pinto, The Web Application Hacker's Handbook, cap. 9.</a:t>
             </a:r>
           </a:p>
@@ -3584,6 +3855,81 @@
           </a:p>
         </p:txBody>
       </p:sp>
+    </p:spTree>
+  </p:cSld>
+  <p:clrMapOvr>
+    <a:masterClrMapping/>
+  </p:clrMapOvr>
+</p:sld>
+</file>
+
+<file path=ppt/slides/slide15.xml><?xml version="1.0" encoding="utf-8"?>
+<p:sld xmlns:a="http://schemas.openxmlformats.org/drawingml/2006/main" xmlns:p="http://schemas.openxmlformats.org/presentationml/2006/main" xmlns:r="http://schemas.openxmlformats.org/officeDocument/2006/relationships">
+  <p:cSld>
+    <p:spTree>
+      <p:nvGrpSpPr>
+        <p:cNvPr id="1" name=""/>
+        <p:cNvGrpSpPr/>
+        <p:nvPr/>
+      </p:nvGrpSpPr>
+      <p:grpSpPr/>
+      <p:sp>
+        <p:nvSpPr>
+          <p:cNvPr id="2" name="TextBox 1"/>
+          <p:cNvSpPr txBox="1"/>
+          <p:nvPr/>
+        </p:nvSpPr>
+        <p:spPr>
+          <a:xfrm>
+            <a:off x="457200" y="274320"/>
+            <a:ext cx="8229600" cy="640080"/>
+          </a:xfrm>
+          <a:prstGeom prst="rect">
+            <a:avLst/>
+          </a:prstGeom>
+          <a:noFill/>
+        </p:spPr>
+        <p:txBody>
+          <a:bodyPr wrap="square">
+            <a:spAutoFit/>
+          </a:bodyPr>
+          <a:lstStyle/>
+          <a:p>
+            <a:r>
+              <a:rPr sz="2200" b="1">
+                <a:solidFill>
+                  <a:srgbClr val="0B3D2E"/>
+                </a:solidFill>
+              </a:rPr>
+              <a:t>Diagrama de la clase</a:t>
+            </a:r>
+          </a:p>
+        </p:txBody>
+      </p:sp>
+      <p:pic>
+        <p:nvPicPr>
+          <p:cNvPr id="3" name="Picture 2" descr="f36705b713d81fd5.png"/>
+          <p:cNvPicPr>
+            <a:picLocks noChangeAspect="1"/>
+          </p:cNvPicPr>
+          <p:nvPr/>
+        </p:nvPicPr>
+        <p:blipFill>
+          <a:blip r:embed="rId2"/>
+          <a:stretch>
+            <a:fillRect/>
+          </a:stretch>
+        </p:blipFill>
+        <p:spPr>
+          <a:xfrm>
+            <a:off x="1278685" y="1097280"/>
+            <a:ext cx="6586629" cy="5303520"/>
+          </a:xfrm>
+          <a:prstGeom prst="rect">
+            <a:avLst/>
+          </a:prstGeom>
+        </p:spPr>
+      </p:pic>
     </p:spTree>
   </p:cSld>
   <p:clrMapOvr>
@@ -3668,7 +4014,7 @@
                   <a:srgbClr val="22282E"/>
                 </a:solidFill>
               </a:rPr>
-              <a:t>•  Explotar SQLi cuando no hay salida directa de datos: inyección ciega booleana, basada en tiempo y out-of-band. Estas técnicas permiten extraer información incluso cuando la aplicación no muestra errores ni resultados, algo muy común en aplicaciones reales bien configuradas.</a:t>
+              <a:t>•  Explotar SQLi cuando no hay salida directa de datos: inyección ciega booleana, basada en tiempo y out-of-band. Estas técnicas permiten extraer información incluso cuando la aplicación no muestra…</a:t>
             </a:r>
           </a:p>
         </p:txBody>
@@ -4062,7 +4408,7 @@
                   <a:srgbClr val="0B3D2E"/>
                 </a:solidFill>
               </a:rPr>
-              <a:t>📖 Definiciones y características</a:t>
+              <a:t>🧠 Explicación en profundidad</a:t>
             </a:r>
           </a:p>
         </p:txBody>
@@ -4100,82 +4446,97 @@
                   <a:srgbClr val="22282E"/>
                 </a:solidFill>
               </a:rPr>
-              <a:t>•  Blind SQLi: la respuesta no incluye datos, solo cambia de forma observable. Característica: se infiere info por diferencias sutiles.</a:t>
-            </a:r>
-          </a:p>
-          <a:p>
-            <a:pPr>
-              <a:spcAft>
-                <a:spcPts val="600"/>
-              </a:spcAft>
-            </a:pPr>
-            <a:r>
-              <a:rPr sz="1500">
-                <a:solidFill>
-                  <a:srgbClr val="22282E"/>
-                </a:solidFill>
-              </a:rPr>
-              <a:t>•  Booleana: se plantean condiciones verdadero/falso. Característica: la página cambia según el resultado.</a:t>
-            </a:r>
-          </a:p>
-          <a:p>
-            <a:pPr>
-              <a:spcAft>
-                <a:spcPts val="600"/>
-              </a:spcAft>
-            </a:pPr>
-            <a:r>
-              <a:rPr sz="1500">
-                <a:solidFill>
-                  <a:srgbClr val="22282E"/>
-                </a:solidFill>
-              </a:rPr>
-              <a:t>•  Basada en tiempo: se induce un retardo condicional. Característica: útil cuando no hay ninguna diferencia visible.</a:t>
-            </a:r>
-          </a:p>
-          <a:p>
-            <a:pPr>
-              <a:spcAft>
-                <a:spcPts val="600"/>
-              </a:spcAft>
-            </a:pPr>
-            <a:r>
-              <a:rPr sz="1500">
-                <a:solidFill>
-                  <a:srgbClr val="22282E"/>
-                </a:solidFill>
-              </a:rPr>
-              <a:t>•  Out-of-band (OOB): los datos salen por DNS/HTTP a un servidor del atacante. Característica: requiere que el motor pueda iniciar conexiones.</a:t>
-            </a:r>
-          </a:p>
-          <a:p>
-            <a:pPr>
-              <a:spcAft>
-                <a:spcPts val="600"/>
-              </a:spcAft>
-            </a:pPr>
-            <a:r>
-              <a:rPr sz="1500">
-                <a:solidFill>
-                  <a:srgbClr val="22282E"/>
-                </a:solidFill>
-              </a:rPr>
-              <a:t>•  Second-order: el input se almacena y se ejecuta en otra operación posterior. Característica: difícil de detectar en el punto de entrada.</a:t>
-            </a:r>
-          </a:p>
-          <a:p>
-            <a:pPr>
-              <a:spcAft>
-                <a:spcPts val="600"/>
-              </a:spcAft>
-            </a:pPr>
-            <a:r>
-              <a:rPr sz="1500">
-                <a:solidFill>
-                  <a:srgbClr val="22282E"/>
-                </a:solidFill>
-              </a:rPr>
-              <a:t>•  Oráculo booleano: cualquier señal binaria fiable (código, longitud, contenido). Característica: base de la extracción bit a bit.</a:t>
+              <a:t>•  En muchas aplicaciones la inyección funciona pero no se ven los resultados: no hay errores,</a:t>
+            </a:r>
+          </a:p>
+          <a:p>
+            <a:pPr>
+              <a:spcAft>
+                <a:spcPts val="600"/>
+              </a:spcAft>
+            </a:pPr>
+            <a:r>
+              <a:rPr sz="1500">
+                <a:solidFill>
+                  <a:srgbClr val="22282E"/>
+                </a:solidFill>
+              </a:rPr>
+              <a:t>•  la consulta no se refleja en la página, solo cambia el comportamiento de forma sutil. Es la</a:t>
+            </a:r>
+          </a:p>
+          <a:p>
+            <a:pPr>
+              <a:spcAft>
+                <a:spcPts val="600"/>
+              </a:spcAft>
+            </a:pPr>
+            <a:r>
+              <a:rPr sz="1500">
+                <a:solidFill>
+                  <a:srgbClr val="22282E"/>
+                </a:solidFill>
+              </a:rPr>
+              <a:t>•  inyección ciega (blind SQLi), y su idea central es que, aunque no puedas leer la base de</a:t>
+            </a:r>
+          </a:p>
+          <a:p>
+            <a:pPr>
+              <a:spcAft>
+                <a:spcPts val="600"/>
+              </a:spcAft>
+            </a:pPr>
+            <a:r>
+              <a:rPr sz="1500">
+                <a:solidFill>
+                  <a:srgbClr val="22282E"/>
+                </a:solidFill>
+              </a:rPr>
+              <a:t>•  datos directamente, sí puedes hacerle preguntas de sí/no y deducir los datos bit a bit por</a:t>
+            </a:r>
+          </a:p>
+          <a:p>
+            <a:pPr>
+              <a:spcAft>
+                <a:spcPts val="600"/>
+              </a:spcAft>
+            </a:pPr>
+            <a:r>
+              <a:rPr sz="1500">
+                <a:solidFill>
+                  <a:srgbClr val="22282E"/>
+                </a:solidFill>
+              </a:rPr>
+              <a:t>•  las respuestas. Es más lenta que la UNION de la clase anterior, pero igual de potente: al final</a:t>
+            </a:r>
+          </a:p>
+          <a:p>
+            <a:pPr>
+              <a:spcAft>
+                <a:spcPts val="600"/>
+              </a:spcAft>
+            </a:pPr>
+            <a:r>
+              <a:rPr sz="1500">
+                <a:solidFill>
+                  <a:srgbClr val="22282E"/>
+                </a:solidFill>
+              </a:rPr>
+              <a:t>•  se extrae exactamente la misma información, solo que interrogando en lugar de leyendo.</a:t>
+            </a:r>
+          </a:p>
+          <a:p>
+            <a:pPr>
+              <a:spcAft>
+                <a:spcPts val="600"/>
+              </a:spcAft>
+            </a:pPr>
+            <a:r>
+              <a:rPr sz="1500">
+                <a:solidFill>
+                  <a:srgbClr val="22282E"/>
+                </a:solidFill>
+              </a:rPr>
+              <a:t>•  La inyección ciega booleana aprovecha cualquier diferencia observable entre una condición</a:t>
             </a:r>
           </a:p>
         </p:txBody>
@@ -4226,7 +4587,7 @@
                   <a:srgbClr val="0B3D2E"/>
                 </a:solidFill>
               </a:rPr>
-              <a:t>🧰 Herramientas y preparación</a:t>
+              <a:t>📖 Definiciones y características</a:t>
             </a:r>
           </a:p>
         </p:txBody>
@@ -4264,37 +4625,82 @@
                   <a:srgbClr val="22282E"/>
                 </a:solidFill>
               </a:rPr>
-              <a:t>•  PortSwigger Web Security Academy (labs de blind SQLi, gratis con cuenta).</a:t>
-            </a:r>
-          </a:p>
-          <a:p>
-            <a:pPr>
-              <a:spcAft>
-                <a:spcPts val="600"/>
-              </a:spcAft>
-            </a:pPr>
-            <a:r>
-              <a:rPr sz="1500">
-                <a:solidFill>
-                  <a:srgbClr val="22282E"/>
-                </a:solidFill>
-              </a:rPr>
-              <a:t>•  Burp Intruder/Repeater para automatizar condiciones.</a:t>
-            </a:r>
-          </a:p>
-          <a:p>
-            <a:pPr>
-              <a:spcAft>
-                <a:spcPts val="600"/>
-              </a:spcAft>
-            </a:pPr>
-            <a:r>
-              <a:rPr sz="1500">
-                <a:solidFill>
-                  <a:srgbClr val="22282E"/>
-                </a:solidFill>
-              </a:rPr>
-              <a:t>•  Burp Collaborator o un servidor DNS propio para OOB.</a:t>
+              <a:t>•  Blind SQLi: la respuesta no incluye datos, solo cambia de forma observable. Característica: se infiere info por diferencias sutiles.</a:t>
+            </a:r>
+          </a:p>
+          <a:p>
+            <a:pPr>
+              <a:spcAft>
+                <a:spcPts val="600"/>
+              </a:spcAft>
+            </a:pPr>
+            <a:r>
+              <a:rPr sz="1500">
+                <a:solidFill>
+                  <a:srgbClr val="22282E"/>
+                </a:solidFill>
+              </a:rPr>
+              <a:t>•  Booleana: se plantean condiciones verdadero/falso. Característica: la página cambia según el resultado.</a:t>
+            </a:r>
+          </a:p>
+          <a:p>
+            <a:pPr>
+              <a:spcAft>
+                <a:spcPts val="600"/>
+              </a:spcAft>
+            </a:pPr>
+            <a:r>
+              <a:rPr sz="1500">
+                <a:solidFill>
+                  <a:srgbClr val="22282E"/>
+                </a:solidFill>
+              </a:rPr>
+              <a:t>•  Basada en tiempo: se induce un retardo condicional. Característica: útil cuando no hay ninguna diferencia visible.</a:t>
+            </a:r>
+          </a:p>
+          <a:p>
+            <a:pPr>
+              <a:spcAft>
+                <a:spcPts val="600"/>
+              </a:spcAft>
+            </a:pPr>
+            <a:r>
+              <a:rPr sz="1500">
+                <a:solidFill>
+                  <a:srgbClr val="22282E"/>
+                </a:solidFill>
+              </a:rPr>
+              <a:t>•  Out-of-band (OOB): los datos salen por DNS/HTTP a un servidor del atacante. Característica: requiere que el motor pueda iniciar conexiones.</a:t>
+            </a:r>
+          </a:p>
+          <a:p>
+            <a:pPr>
+              <a:spcAft>
+                <a:spcPts val="600"/>
+              </a:spcAft>
+            </a:pPr>
+            <a:r>
+              <a:rPr sz="1500">
+                <a:solidFill>
+                  <a:srgbClr val="22282E"/>
+                </a:solidFill>
+              </a:rPr>
+              <a:t>•  Second-order: el input se almacena y se ejecuta en otra operación posterior. Característica: difícil de detectar en el punto de entrada.</a:t>
+            </a:r>
+          </a:p>
+          <a:p>
+            <a:pPr>
+              <a:spcAft>
+                <a:spcPts val="600"/>
+              </a:spcAft>
+            </a:pPr>
+            <a:r>
+              <a:rPr sz="1500">
+                <a:solidFill>
+                  <a:srgbClr val="22282E"/>
+                </a:solidFill>
+              </a:rPr>
+              <a:t>•  Oráculo booleano: cualquier señal binaria fiable (código, longitud, contenido). Característica: base de la extracción bit a bit.</a:t>
             </a:r>
           </a:p>
         </p:txBody>
@@ -4345,7 +4751,7 @@
                   <a:srgbClr val="0B3D2E"/>
                 </a:solidFill>
               </a:rPr>
-              <a:t>🧪 Laboratorio guiado</a:t>
+              <a:t>📔 Glosario</a:t>
             </a:r>
           </a:p>
         </p:txBody>
@@ -4383,97 +4789,97 @@
                   <a:srgbClr val="22282E"/>
                 </a:solidFill>
               </a:rPr>
-              <a:t>•  Elige el lab "Blind SQL injection with conditional responses" de PortSwigger.</a:t>
-            </a:r>
-          </a:p>
-          <a:p>
-            <a:pPr>
-              <a:spcAft>
-                <a:spcPts val="600"/>
-              </a:spcAft>
-            </a:pPr>
-            <a:r>
-              <a:rPr sz="1500">
-                <a:solidFill>
-                  <a:srgbClr val="22282E"/>
-                </a:solidFill>
-              </a:rPr>
-              <a:t>•  Identifica el oráculo: un mensaje que aparece solo cuando la condición es verdadera.</a:t>
-            </a:r>
-          </a:p>
-          <a:p>
-            <a:pPr>
-              <a:spcAft>
-                <a:spcPts val="600"/>
-              </a:spcAft>
-            </a:pPr>
-            <a:r>
-              <a:rPr sz="1500">
-                <a:solidFill>
-                  <a:srgbClr val="22282E"/>
-                </a:solidFill>
-              </a:rPr>
-              <a:t>•  Confirma inyección con ' AND 1=1-- - (aparece) vs. ' AND 1=2-- - (no aparece).</a:t>
-            </a:r>
-          </a:p>
-          <a:p>
-            <a:pPr>
-              <a:spcAft>
-                <a:spcPts val="600"/>
-              </a:spcAft>
-            </a:pPr>
-            <a:r>
-              <a:rPr sz="1500">
-                <a:solidFill>
-                  <a:srgbClr val="22282E"/>
-                </a:solidFill>
-              </a:rPr>
-              <a:t>•  Extrae un carácter con:</a:t>
-            </a:r>
-          </a:p>
-          <a:p>
-            <a:pPr>
-              <a:spcAft>
-                <a:spcPts val="600"/>
-              </a:spcAft>
-            </a:pPr>
-            <a:r>
-              <a:rPr sz="1500">
-                <a:solidFill>
-                  <a:srgbClr val="22282E"/>
-                </a:solidFill>
-              </a:rPr>
-              <a:t>•  ' AND SUBSTRING((SELECT password FROM users WHERE username='administrator'),1,1)='a'-- -</a:t>
-            </a:r>
-          </a:p>
-          <a:p>
-            <a:pPr>
-              <a:spcAft>
-                <a:spcPts val="600"/>
-              </a:spcAft>
-            </a:pPr>
-            <a:r>
-              <a:rPr sz="1500">
-                <a:solidFill>
-                  <a:srgbClr val="22282E"/>
-                </a:solidFill>
-              </a:rPr>
-              <a:t>•  Itera posición y valor (con Intruder, cluster bomb) para reconstruir la contraseña.</a:t>
-            </a:r>
-          </a:p>
-          <a:p>
-            <a:pPr>
-              <a:spcAft>
-                <a:spcPts val="600"/>
-              </a:spcAft>
-            </a:pPr>
-            <a:r>
-              <a:rPr sz="1500">
-                <a:solidFill>
-                  <a:srgbClr val="22282E"/>
-                </a:solidFill>
-              </a:rPr>
-              <a:t>•  Practica el lab de blind temporal: '; IF (condición) WAITFOR DELAY '0:0:5'-- - (MSSQL) o ' AND SLEEP(5)-- - (MySQL).</a:t>
+              <a:t>•  Término — Definición concisa</a:t>
+            </a:r>
+          </a:p>
+          <a:p>
+            <a:pPr>
+              <a:spcAft>
+                <a:spcPts val="600"/>
+              </a:spcAft>
+            </a:pPr>
+            <a:r>
+              <a:rPr sz="1500">
+                <a:solidFill>
+                  <a:srgbClr val="22282E"/>
+                </a:solidFill>
+              </a:rPr>
+              <a:t>•  Inyección ciega (blind) — La inyección funciona pero no se ven los datos</a:t>
+            </a:r>
+          </a:p>
+          <a:p>
+            <a:pPr>
+              <a:spcAft>
+                <a:spcPts val="600"/>
+              </a:spcAft>
+            </a:pPr>
+            <a:r>
+              <a:rPr sz="1500">
+                <a:solidFill>
+                  <a:srgbClr val="22282E"/>
+                </a:solidFill>
+              </a:rPr>
+              <a:t>•  Booleana — Deducir datos por la diferencia entre condición verdadera y falsa</a:t>
+            </a:r>
+          </a:p>
+          <a:p>
+            <a:pPr>
+              <a:spcAft>
+                <a:spcPts val="600"/>
+              </a:spcAft>
+            </a:pPr>
+            <a:r>
+              <a:rPr sz="1500">
+                <a:solidFill>
+                  <a:srgbClr val="22282E"/>
+                </a:solidFill>
+              </a:rPr>
+              <a:t>•  SUBSTRING / SUBSTR — Aísla un carácter del dato buscado</a:t>
+            </a:r>
+          </a:p>
+          <a:p>
+            <a:pPr>
+              <a:spcAft>
+                <a:spcPts val="600"/>
+              </a:spcAft>
+            </a:pPr>
+            <a:r>
+              <a:rPr sz="1500">
+                <a:solidFill>
+                  <a:srgbClr val="22282E"/>
+                </a:solidFill>
+              </a:rPr>
+              <a:t>•  ASCII / ORD — Compara un carácter por su valor numérico</a:t>
+            </a:r>
+          </a:p>
+          <a:p>
+            <a:pPr>
+              <a:spcAft>
+                <a:spcPts val="600"/>
+              </a:spcAft>
+            </a:pPr>
+            <a:r>
+              <a:rPr sz="1500">
+                <a:solidFill>
+                  <a:srgbClr val="22282E"/>
+                </a:solidFill>
+              </a:rPr>
+              <a:t>•  Búsqueda binaria — Acota el carácter con comparaciones &gt;/&lt;</a:t>
+            </a:r>
+          </a:p>
+          <a:p>
+            <a:pPr>
+              <a:spcAft>
+                <a:spcPts val="600"/>
+              </a:spcAft>
+            </a:pPr>
+            <a:r>
+              <a:rPr sz="1500">
+                <a:solidFill>
+                  <a:srgbClr val="22282E"/>
+                </a:solidFill>
+              </a:rPr>
+              <a:t>•  Inyección temporal — Deducir por el tiempo de respuesta (SLEEP, WAITFOR)</a:t>
             </a:r>
           </a:p>
         </p:txBody>
@@ -4524,7 +4930,7 @@
                   <a:srgbClr val="0B3D2E"/>
                 </a:solidFill>
               </a:rPr>
-              <a:t>✍️ Ejercicios</a:t>
+              <a:t>🧰 Herramientas y preparación</a:t>
             </a:r>
           </a:p>
         </p:txBody>
@@ -4562,82 +4968,37 @@
                   <a:srgbClr val="22282E"/>
                 </a:solidFill>
               </a:rPr>
-              <a:t>•  Reconstruye una contraseña de 20 caracteres con blind booleana y mide cuántas peticiones costó.</a:t>
-            </a:r>
-          </a:p>
-          <a:p>
-            <a:pPr>
-              <a:spcAft>
-                <a:spcPts val="600"/>
-              </a:spcAft>
-            </a:pPr>
-            <a:r>
-              <a:rPr sz="1500">
-                <a:solidFill>
-                  <a:srgbClr val="22282E"/>
-                </a:solidFill>
-              </a:rPr>
-              <a:t>•  Optimiza la extracción usando búsqueda binaria (&gt; en vez de =).</a:t>
-            </a:r>
-          </a:p>
-          <a:p>
-            <a:pPr>
-              <a:spcAft>
-                <a:spcPts val="600"/>
-              </a:spcAft>
-            </a:pPr>
-            <a:r>
-              <a:rPr sz="1500">
-                <a:solidFill>
-                  <a:srgbClr val="22282E"/>
-                </a:solidFill>
-              </a:rPr>
-              <a:t>•  Escribe el payload temporal equivalente para MySQL, MSSQL y PostgreSQL.</a:t>
-            </a:r>
-          </a:p>
-          <a:p>
-            <a:pPr>
-              <a:spcAft>
-                <a:spcPts val="600"/>
-              </a:spcAft>
-            </a:pPr>
-            <a:r>
-              <a:rPr sz="1500">
-                <a:solidFill>
-                  <a:srgbClr val="22282E"/>
-                </a:solidFill>
-              </a:rPr>
-              <a:t>•  Explica por qué la blind temporal es la más ruidosa y lenta.</a:t>
-            </a:r>
-          </a:p>
-          <a:p>
-            <a:pPr>
-              <a:spcAft>
-                <a:spcPts val="600"/>
-              </a:spcAft>
-            </a:pPr>
-            <a:r>
-              <a:rPr sz="1500">
-                <a:solidFill>
-                  <a:srgbClr val="22282E"/>
-                </a:solidFill>
-              </a:rPr>
-              <a:t>•  Diseña un oráculo booleano a partir del tamaño de la respuesta.</a:t>
-            </a:r>
-          </a:p>
-          <a:p>
-            <a:pPr>
-              <a:spcAft>
-                <a:spcPts val="600"/>
-              </a:spcAft>
-            </a:pPr>
-            <a:r>
-              <a:rPr sz="1500">
-                <a:solidFill>
-                  <a:srgbClr val="22282E"/>
-                </a:solidFill>
-              </a:rPr>
-              <a:t>•  Describe un escenario de second-order SQLi con un caso de registro de usuario.</a:t>
+              <a:t>•  PortSwigger Web Security Academy (labs de blind SQLi, gratis con cuenta).</a:t>
+            </a:r>
+          </a:p>
+          <a:p>
+            <a:pPr>
+              <a:spcAft>
+                <a:spcPts val="600"/>
+              </a:spcAft>
+            </a:pPr>
+            <a:r>
+              <a:rPr sz="1500">
+                <a:solidFill>
+                  <a:srgbClr val="22282E"/>
+                </a:solidFill>
+              </a:rPr>
+              <a:t>•  Burp Intruder/Repeater para automatizar condiciones.</a:t>
+            </a:r>
+          </a:p>
+          <a:p>
+            <a:pPr>
+              <a:spcAft>
+                <a:spcPts val="600"/>
+              </a:spcAft>
+            </a:pPr>
+            <a:r>
+              <a:rPr sz="1500">
+                <a:solidFill>
+                  <a:srgbClr val="22282E"/>
+                </a:solidFill>
+              </a:rPr>
+              <a:t>•  Burp Collaborator o un servidor DNS propio para OOB.</a:t>
             </a:r>
           </a:p>
         </p:txBody>
@@ -4688,7 +5049,7 @@
                   <a:srgbClr val="0B3D2E"/>
                 </a:solidFill>
               </a:rPr>
-              <a:t>📝 Reto verificable</a:t>
+              <a:t>🧪 Laboratorio guiado</a:t>
             </a:r>
           </a:p>
         </p:txBody>
@@ -4726,22 +5087,97 @@
                   <a:srgbClr val="22282E"/>
                 </a:solidFill>
               </a:rPr>
-              <a:t>•  Extrae la contraseña completa del usuario administrator en un lab de blind SQLi de PortSwigger usando solo condiciones booleanas automatizadas.</a:t>
-            </a:r>
-          </a:p>
-          <a:p>
-            <a:pPr>
-              <a:spcAft>
-                <a:spcPts val="600"/>
-              </a:spcAft>
-            </a:pPr>
-            <a:r>
-              <a:rPr sz="1500">
-                <a:solidFill>
-                  <a:srgbClr val="22282E"/>
-                </a:solidFill>
-              </a:rPr>
-              <a:t>•  Criterio de aceptación: entregas la contraseña recuperada, la configuración de Intruder (posiciones y payload set) y el número de peticiones necesarias, resolviendo el lab.</a:t>
+              <a:t>•  Elige el lab "Blind SQL injection with conditional responses" de PortSwigger.</a:t>
+            </a:r>
+          </a:p>
+          <a:p>
+            <a:pPr>
+              <a:spcAft>
+                <a:spcPts val="600"/>
+              </a:spcAft>
+            </a:pPr>
+            <a:r>
+              <a:rPr sz="1500">
+                <a:solidFill>
+                  <a:srgbClr val="22282E"/>
+                </a:solidFill>
+              </a:rPr>
+              <a:t>•  Identifica el oráculo: un mensaje que aparece solo cuando la condición es verdadera.</a:t>
+            </a:r>
+          </a:p>
+          <a:p>
+            <a:pPr>
+              <a:spcAft>
+                <a:spcPts val="600"/>
+              </a:spcAft>
+            </a:pPr>
+            <a:r>
+              <a:rPr sz="1500">
+                <a:solidFill>
+                  <a:srgbClr val="22282E"/>
+                </a:solidFill>
+              </a:rPr>
+              <a:t>•  Confirma inyección con ' AND 1=1-- - (aparece) vs. ' AND 1=2-- - (no aparece).</a:t>
+            </a:r>
+          </a:p>
+          <a:p>
+            <a:pPr>
+              <a:spcAft>
+                <a:spcPts val="600"/>
+              </a:spcAft>
+            </a:pPr>
+            <a:r>
+              <a:rPr sz="1500">
+                <a:solidFill>
+                  <a:srgbClr val="22282E"/>
+                </a:solidFill>
+              </a:rPr>
+              <a:t>•  Extrae un carácter con:</a:t>
+            </a:r>
+          </a:p>
+          <a:p>
+            <a:pPr>
+              <a:spcAft>
+                <a:spcPts val="600"/>
+              </a:spcAft>
+            </a:pPr>
+            <a:r>
+              <a:rPr sz="1500">
+                <a:solidFill>
+                  <a:srgbClr val="22282E"/>
+                </a:solidFill>
+              </a:rPr>
+              <a:t>•  Itera posición y valor (con Intruder, cluster bomb) para reconstruir la contraseña.</a:t>
+            </a:r>
+          </a:p>
+          <a:p>
+            <a:pPr>
+              <a:spcAft>
+                <a:spcPts val="600"/>
+              </a:spcAft>
+            </a:pPr>
+            <a:r>
+              <a:rPr sz="1500">
+                <a:solidFill>
+                  <a:srgbClr val="22282E"/>
+                </a:solidFill>
+              </a:rPr>
+              <a:t>•  Practica el lab de blind temporal: '; IF (condición) WAITFOR DELAY '0:0:5'-- - (MSSQL) o ' AND SLEEP(5)-- - (MySQL).</a:t>
+            </a:r>
+          </a:p>
+          <a:p>
+            <a:pPr>
+              <a:spcAft>
+                <a:spcPts val="600"/>
+              </a:spcAft>
+            </a:pPr>
+            <a:r>
+              <a:rPr sz="1500">
+                <a:solidFill>
+                  <a:srgbClr val="22282E"/>
+                </a:solidFill>
+              </a:rPr>
+              <a:t>•  En el lab OOB, provoca una interacción DNS hacia Collaborator para exfiltrar datos.</a:t>
             </a:r>
           </a:p>
         </p:txBody>
